--- a/assets/pptx/catalog-770.pptx
+++ b/assets/pptx/catalog-770.pptx
@@ -3241,7 +3241,7 @@
                 <a:ea typeface="Ebrima"/>
                 <a:cs typeface="Ebrima"/>
               </a:rPr>
-              <a:t>አዝ የእግዚአብሔር ክንድ ሆይ ተነስ (3x) በእኛ</a:t>
+              <a:t>አዝ የእግዚአብሔር ክንድ ሆይ ተነስ 3x በእኛ</a:t>
             </a:r>
           </a:p>
           <a:p>
@@ -3277,7 +3277,7 @@
                 <a:ea typeface="Ebrima"/>
                 <a:cs typeface="Ebrima"/>
               </a:rPr>
-              <a:t>ዛሬም ይንቀሳቀስ በእኛ (2x)</a:t>
+              <a:t>ዛሬም ይንቀሳቀስ በእኛ 2x</a:t>
             </a:r>
           </a:p>
           <a:p>
@@ -3367,7 +3367,7 @@
                 <a:ea typeface="Ebrima"/>
                 <a:cs typeface="Ebrima"/>
               </a:rPr>
-              <a:t>አዝ የእግዚአብሔር ክንድ ሆይ ተነስ (3x) በእኛ</a:t>
+              <a:t>አዝ የእግዚአብሔር ክንድ ሆይ ተነስ 3x በእኛ</a:t>
             </a:r>
           </a:p>
           <a:p>
@@ -3403,7 +3403,7 @@
                 <a:ea typeface="Ebrima"/>
                 <a:cs typeface="Ebrima"/>
               </a:rPr>
-              <a:t>ዛሬም ይንቀሳቀስ በእኛ (2x)</a:t>
+              <a:t>ዛሬም ይንቀሳቀስ በእኛ 2x</a:t>
             </a:r>
           </a:p>
           <a:p>
@@ -3493,7 +3493,7 @@
                 <a:ea typeface="Ebrima"/>
                 <a:cs typeface="Ebrima"/>
               </a:rPr>
-              <a:t>አዝ የእግዚአብሔር ክንድ ሆይ ተነስ (3x) በእኛ</a:t>
+              <a:t>አዝ የእግዚአብሔር ክንድ ሆይ ተነስ 3x በእኛ</a:t>
             </a:r>
           </a:p>
           <a:p>
@@ -3529,7 +3529,7 @@
                 <a:ea typeface="Ebrima"/>
                 <a:cs typeface="Ebrima"/>
               </a:rPr>
-              <a:t>ዛሬም ይንቀሳቀስ በእኛ (2x)</a:t>
+              <a:t>ዛሬም ይንቀሳቀስ በእኛ 2x</a:t>
             </a:r>
           </a:p>
           <a:p>
@@ -3619,7 +3619,7 @@
                 <a:ea typeface="Ebrima"/>
                 <a:cs typeface="Ebrima"/>
               </a:rPr>
-              <a:t>አዝ የእግዚአብሔር ክንድ ሆይ ተነስ (3x) በእኛ</a:t>
+              <a:t>አዝ የእግዚአብሔር ክንድ ሆይ ተነስ 3x በእኛ</a:t>
             </a:r>
           </a:p>
           <a:p>
@@ -3655,7 +3655,7 @@
                 <a:ea typeface="Ebrima"/>
                 <a:cs typeface="Ebrima"/>
               </a:rPr>
-              <a:t>ዛሬም ይንቀሳቀስ በእኛ (2x)</a:t>
+              <a:t>ዛሬም ይንቀሳቀስ በእኛ 2x</a:t>
             </a:r>
           </a:p>
         </p:txBody>
